--- a/W3A2/W3A2 presentation.pptx
+++ b/W3A2/W3A2 presentation.pptx
@@ -959,7 +959,12 @@
               </a:rPr>
               <a:t>Correlation Analysis</a:t>
             </a:r>
-            <a:endParaRPr lang="en-US" sz="3600" dirty="0"/>
+          </a:p>
+          <a:p>
+            <a:r>
+              <a:rPr lang="en-US" sz="3600" dirty="0"/>
+              <a:t>messy_dataset_Mukesh.csv</a:t>
+            </a:r>
           </a:p>
         </p:txBody>
       </p:sp>
